--- a/decks/hist-russian-revolution/hist-russian-revolution_ch3_why-the-tsar-fell.pptx
+++ b/decks/hist-russian-revolution/hist-russian-revolution_ch3_why-the-tsar-fell.pptx
@@ -129,30 +129,30 @@
   <p:extLst>
     <p:ext uri="{521415D9-36F7-43E2-AB2F-B90AF26B5E84}">
       <p14:sectionLst xmlns:p14="http://schemas.microsoft.com/office/powerpoint/2010/main">
-        <p14:section name="Opening" id="{164624bb-23cb-1f4d-cb8d-078bc435aa4c}">
+        <p14:section name="Opening" id="{e86dde6a-d506-51ef-7753-437f3e8d4698}">
           <p14:sldIdLst>
             <p14:sldId id="256"/>
           </p14:sldIdLst>
         </p14:section>
-        <p14:section name="Gate" id="{e1e19dbd-8258-f48f-18a7-f7db5339e0a4}">
+        <p14:section name="Gate" id="{4d851d47-2b33-5622-4b90-d30d021fa23a}">
           <p14:sldIdLst>
             <p14:sldId id="257"/>
             <p14:sldId id="258"/>
           </p14:sldIdLst>
         </p14:section>
-        <p14:section name="Pre-teach" id="{ee67d5a9-bb54-f2d1-5f78-f61f922c0c16}">
+        <p14:section name="Pre-teach" id="{d91ed2d3-00a6-3d31-1faa-d7ce37384e2e}">
           <p14:sldIdLst>
             <p14:sldId id="259"/>
             <p14:sldId id="260"/>
           </p14:sldIdLst>
         </p14:section>
-        <p14:section name="Read-along" id="{dd48e04b-d12a-9265-0abb-8f0e0cdba710}">
+        <p14:section name="Read-along" id="{c76d52b1-c78e-22b4-0703-f07d7a89c65a}">
           <p14:sldIdLst>
             <p14:sldId id="261"/>
             <p14:sldId id="262"/>
           </p14:sldIdLst>
         </p14:section>
-        <p14:section name="Teach" id="{fecee5ad-e2c6-9ab5-da7a-51a8dfbcb42e}">
+        <p14:section name="Teach" id="{22707025-46d3-bd59-7eea-715c05d50c4a}">
           <p14:sldIdLst>
             <p14:sldId id="263"/>
             <p14:sldId id="264"/>
@@ -161,7 +161,7 @@
             <p14:sldId id="267"/>
           </p14:sldIdLst>
         </p14:section>
-        <p14:section name="Routes" id="{c0d86a85-17f9-8bcd-911e-67dfb585656a}">
+        <p14:section name="Routes" id="{f5cc90a1-7f95-ca86-5040-e725fa9d9f2c}">
           <p14:sldIdLst>
             <p14:sldId id="268"/>
             <p14:sldId id="269"/>
@@ -171,12 +171,12 @@
             <p14:sldId id="273"/>
           </p14:sldIdLst>
         </p14:section>
-        <p14:section name="Close" id="{2d980d1f-35ec-b525-2f68-cf70a7c4736e}">
+        <p14:section name="Close" id="{2772465a-1339-45b1-cb1e-a1e313f141b3}">
           <p14:sldIdLst>
             <p14:sldId id="274"/>
           </p14:sldIdLst>
         </p14:section>
-        <p14:section name="Answers" id="{98ecd312-8dbf-9a89-5ab1-2e1b5a5a250d}">
+        <p14:section name="Answers" id="{9ff9d0a0-faf9-66b7-822b-49ce09168073}">
           <p14:sldIdLst>
             <p14:sldId id="275"/>
             <p14:sldId id="276"/>
@@ -866,7 +866,7 @@
             <a:r>
               <a:rPr lang="en-US" dirty="0"/>
               <a:t>Teach — The war and Rasputin: the last two causes. Say it in your own words, then check understanding with a quick question: ask a pupil from the pre-teach group first, since they met these words and ideas before the lesson. Pupils try to recall before you re-explain.
-Your lesson calls the First World War probably the most important factor of all, and gives three reasons. Russia suffered defeat after defeat; the Tsar was popular at first but then blamed, especially after he made himself commander-in-chief of the armed forces in 1915; and the defeats killed the most loyal soldiers, the very men who had protected him from his critics. The casualty figures your lesson gives are hard to take in: over one million killed or wounded by the end of 1914, around 5.3 million by 1916, and about eight million by 1917. Each of those numbers is somebody's son or father.
+Your lesson calls the First World War probably the most important factor of all, and gives three reasons. Russia suffered defeat after defeat; the Tsar was popular at first but then blamed, and the blame settled on him personally once he took command of the armed forces in 1915; and the defeats killed the most loyal soldiers, the very men who had protected him from his critics. The casualty figures your lesson gives are hard to take in: over one million killed or wounded by the end of 1914, around 5.3 million by 1916, and about eight million by 1917. Each of those numbers is somebody's son or father.
 Taking command in 1915 was the decision that mattered most, and your lesson's decision-making activity shows why. Before it, defeats belonged to his generals. After it, every defeat belonged to him. On top of that he left the capital, handing the running of the country to the Tsarina, who was unpopular, suspected because she was a German princess, and mistrusted for the ministers she appointed.
 That is where Rasputin comes in. Rasputin was a healer the Tsarina believed could help her ill son, and she came to rely on his advice. Critics spread rumours about his relationship with her, and he was blamed for the weak ministers chosen during the war. To ordinary Russians he came to stand for everything wrong with the royal court. He was murdered in 1916, but by then the respect the Tsar needed had already gone.
 Tip: If you only have room for two causes, choose the war and autocracy, then use Rasputin as the detail that shows how little respect was left.</a:t>
